--- a/10-Knowledge-Products/KP1-GEA/videos/module_1/en/decks/KP1_M1_Deck_v0.2.pptx
+++ b/10-Knowledge-Products/KP1-GEA/videos/module_1/en/decks/KP1_M1_Deck_v0.2.pptx
@@ -18836,7 +18836,7 @@
                 </a:solidFill>
                 <a:latin typeface="Arial"/>
               </a:rPr>
-              <a:t>KP1 · MODULE 1 · VIDEO 1.3</a:t>
+              <a:t>MODULE 1 · VIDEO 1.3</a:t>
             </a:r>
           </a:p>
         </p:txBody>
@@ -21787,7 +21787,7 @@
                 </a:solidFill>
                 <a:latin typeface="Arial"/>
               </a:rPr>
-              <a:t>KP1 · MODULE 1 · VIDEO 1.4</a:t>
+              <a:t>MODULE 1 · VIDEO 1.4</a:t>
             </a:r>
           </a:p>
         </p:txBody>
@@ -23233,7 +23233,7 @@
                 </a:solidFill>
                 <a:latin typeface="Arial"/>
               </a:rPr>
-              <a:t>KP1 · MODULE 1 · VIDEO 1.1</a:t>
+              <a:t>MODULE 1 · VIDEO 1.1</a:t>
             </a:r>
           </a:p>
         </p:txBody>
@@ -24846,7 +24846,7 @@
                 </a:solidFill>
                 <a:latin typeface="Arial"/>
               </a:rPr>
-              <a:t>KP1 · MODULE 1 · VIDEO 1.5</a:t>
+              <a:t>MODULE 1 · VIDEO 1.5</a:t>
             </a:r>
           </a:p>
         </p:txBody>
@@ -28289,7 +28289,7 @@
                 </a:solidFill>
                 <a:latin typeface="Arial"/>
               </a:rPr>
-              <a:t>KP1 · MODULE 1 · VIDEO 1.6</a:t>
+              <a:t>MODULE 1 · VIDEO 1.6</a:t>
             </a:r>
           </a:p>
         </p:txBody>
@@ -32078,7 +32078,7 @@
                 </a:solidFill>
                 <a:latin typeface="Arial"/>
               </a:rPr>
-              <a:t>KP1 · MODULE 1 · VIDEO 1.7</a:t>
+              <a:t>MODULE 1 · VIDEO 1.7</a:t>
             </a:r>
           </a:p>
         </p:txBody>
@@ -37721,7 +37721,7 @@
                 </a:solidFill>
                 <a:latin typeface="Arial"/>
               </a:rPr>
-              <a:t>KP1 · MODULE 1 · VIDEO 1.2</a:t>
+              <a:t>MODULE 1 · VIDEO 1.2</a:t>
             </a:r>
           </a:p>
         </p:txBody>
